--- a/docs/ahg-2026/kit/examples/maria-alternate-format-planner.pptx
+++ b/docs/ahg-2026/kit/examples/maria-alternate-format-planner.pptx
@@ -30,6 +30,7 @@
     <p:sldId id="278" r:id="rId29"/>
     <p:sldId id="279" r:id="rId30"/>
     <p:sldId id="280" r:id="rId31"/>
+    <p:sldId id="281" r:id="rId32"/>
   </p:sldIdLst>
   <p:sldSz cx="12191695" cy="6858000" type="screen4x3"/>
   <p:notesSz cx="6858000" cy="9144000"/>
@@ -4953,7 +4954,7 @@
               <a:rPr sz="2000" b="0" lang="en-US">
                 <a:latin typeface="Arial"/>
               </a:rPr>
-              <a:t>At 3:05 Maria opens the share page, chooses her newest file, version 4, and presses the button. GitHub's share form opens already filled in; she ticks the privacy box and presses Submit new issue. A minute later the reply says "Your agent is in", and her agent is in the AHG 2026 collection as </a:t>
+              <a:t>At 3:05 Maria opens the share page, chooses her newest file, version 4, and presses the button. GitHub's share form opens already filled in; she checks the privacy check box and presses Submit new issue. A minute later the reply says "Your agent is in", and her agent is in the AHG 2026 collection as </a:t>
             </a:r>
             <a:r>
               <a:rPr sz="2000" b="0" lang="en-US">
@@ -5242,7 +5243,7 @@
                         <a:rPr sz="1800" b="0" lang="en-US">
                           <a:latin typeface="Arial"/>
                         </a:rPr>
-                        <a:t>Nothing goes to a student until the page-by-page check is ticked</a:t>
+                        <a:t>Nothing goes to a student until the page-by-page check box is checked</a:t>
                       </a:r>
                     </a:p>
                   </a:txBody>
@@ -5454,6 +5455,161 @@
           </a:graphicData>
         </a:graphic>
       </p:graphicFrame>
+    </p:spTree>
+  </p:cSld>
+  <p:clrMapOvr>
+    <a:masterClrMapping/>
+  </p:clrMapOvr>
+</p:sld>
+</file>
+
+<file path=ppt/slides/slide26.xml><?xml version="1.0" encoding="utf-8"?>
+<p:sld xmlns:a="http://schemas.openxmlformats.org/drawingml/2006/main" xmlns:p="http://schemas.openxmlformats.org/presentationml/2006/main" xmlns:r="http://schemas.openxmlformats.org/officeDocument/2006/relationships">
+  <p:cSld>
+    <p:spTree>
+      <p:nvGrpSpPr>
+        <p:cNvPr id="1" name=""/>
+        <p:cNvGrpSpPr/>
+        <p:nvPr/>
+      </p:nvGrpSpPr>
+      <p:grpSpPr/>
+      <p:sp>
+        <p:nvSpPr>
+          <p:cNvPr id="2" name="Title 1"/>
+          <p:cNvSpPr>
+            <a:spLocks noGrp="1"/>
+          </p:cNvSpPr>
+          <p:nvPr>
+            <p:ph type="title"/>
+          </p:nvPr>
+        </p:nvSpPr>
+        <p:spPr>
+          <a:xfrm>
+            <a:off x="548640" y="365760"/>
+            <a:ext cx="11064240" cy="1097280"/>
+          </a:xfrm>
+        </p:spPr>
+        <p:txBody>
+          <a:bodyPr wrap="square"/>
+          <a:lstStyle/>
+          <a:p>
+            <a:r>
+              <a:rPr sz="3600" b="1" lang="en-US">
+                <a:latin typeface="Arial"/>
+              </a:rPr>
+              <a:t>Sources</a:t>
+            </a:r>
+          </a:p>
+        </p:txBody>
+      </p:sp>
+      <p:sp>
+        <p:nvSpPr>
+          <p:cNvPr id="3" name="Content Placeholder 2"/>
+          <p:cNvSpPr>
+            <a:spLocks noGrp="1"/>
+          </p:cNvSpPr>
+          <p:nvPr>
+            <p:ph idx="1"/>
+          </p:nvPr>
+        </p:nvSpPr>
+        <p:spPr>
+          <a:xfrm>
+            <a:off x="548640" y="1554480"/>
+            <a:ext cx="11064240" cy="4937760"/>
+          </a:xfrm>
+        </p:spPr>
+        <p:txBody>
+          <a:bodyPr wrap="square"/>
+          <a:lstStyle/>
+          <a:p>
+            <a:pPr marL="0" indent="0">
+              <a:spcAft>
+                <a:spcPts val="600"/>
+              </a:spcAft>
+              <a:buNone/>
+            </a:pPr>
+            <a:r>
+              <a:rPr sz="2000" b="0" lang="en-US">
+                <a:latin typeface="Arial"/>
+              </a:rPr>
+              <a:t>Checked on 29 October 2026.</a:t>
+            </a:r>
+          </a:p>
+          <a:p>
+            <a:pPr lvl="1">
+              <a:spcAft>
+                <a:spcPts val="600"/>
+              </a:spcAft>
+            </a:pPr>
+            <a:r>
+              <a:rPr sz="2000" b="0" lang="en-US">
+                <a:latin typeface="Arial"/>
+                <a:hlinkClick r:id="rId2"/>
+              </a:rPr>
+              <a:t>WCAG 2.2</a:t>
+            </a:r>
+            <a:r>
+              <a:rPr sz="2000" b="0" lang="en-US">
+                <a:latin typeface="Arial"/>
+              </a:rPr>
+              <a:t>, the current W3C Recommendation.</a:t>
+            </a:r>
+          </a:p>
+          <a:p>
+            <a:pPr lvl="1">
+              <a:spcAft>
+                <a:spcPts val="600"/>
+              </a:spcAft>
+            </a:pPr>
+            <a:r>
+              <a:rPr sz="2000" b="0" lang="en-US">
+                <a:latin typeface="Arial"/>
+                <a:hlinkClick r:id="rId3"/>
+              </a:rPr>
+              <a:t>Understanding 1.4.5 Images of Text</a:t>
+            </a:r>
+            <a:r>
+              <a:rPr sz="2000" b="0" lang="en-US">
+                <a:latin typeface="Arial"/>
+              </a:rPr>
+              <a:t> and </a:t>
+            </a:r>
+            <a:r>
+              <a:rPr sz="2000" b="0" lang="en-US">
+                <a:latin typeface="Arial"/>
+                <a:hlinkClick r:id="rId4"/>
+              </a:rPr>
+              <a:t>Understanding 1.1.1 Non-text Content</a:t>
+            </a:r>
+            <a:r>
+              <a:rPr sz="2000" b="0" lang="en-US">
+                <a:latin typeface="Arial"/>
+              </a:rPr>
+              <a:t>.</a:t>
+            </a:r>
+          </a:p>
+          <a:p>
+            <a:pPr lvl="1">
+              <a:spcAft>
+                <a:spcPts val="600"/>
+              </a:spcAft>
+            </a:pPr>
+            <a:r>
+              <a:rPr sz="2000" b="0" lang="en-US">
+                <a:latin typeface="Arial"/>
+                <a:hlinkClick r:id="rId5"/>
+              </a:rPr>
+              <a:t>ACB Large Print Guidelines</a:t>
+            </a:r>
+            <a:r>
+              <a:rPr sz="2000" b="0" lang="en-US">
+                <a:latin typeface="Arial"/>
+              </a:rPr>
+              <a:t>, from the American Council of the Blind.</a:t>
+            </a:r>
+          </a:p>
+        </p:txBody>
+      </p:sp>
     </p:spTree>
   </p:cSld>
   <p:clrMapOvr>
@@ -6244,7 +6400,7 @@
               <a:rPr sz="1800" b="0" lang="en-US">
                 <a:latin typeface="Consolas"/>
               </a:rPr>
-              <a:t>description: Plans alternate formats for a course document from a checker's report and the formats a student needs.</a:t>
+              <a:t>description: Plans alternate formats for a course document from a checker's report and the formats a student needs. Use when a student needs a course document in large print, audio, braille or another format.</a:t>
             </a:r>
             <a:br/>
             <a:r>
